--- a/tests/testthat/temp_rich_fullslide.pptx
+++ b/tests/testthat/temp_rich_fullslide.pptx
@@ -5,10 +5,10 @@
     <p:sldMasterId id="2147483831" r:id="rId1"/>
   </p:sldMasterIdLst>
   <p:notesMasterIdLst>
-    <p:notesMasterId r:id="rId2"/>
+    <p:notesMasterId r:id="rId3"/>
   </p:notesMasterIdLst>
   <p:sldIdLst>
-    <p:sldId id="256" r:id="rId8"/>
+    <p:sldId id="256" r:id="rId2"/>
   </p:sldIdLst>
   <p:sldSz cx="12192000" cy="6858000"/>
   <p:notesSz cx="6858000" cy="9144000"/>
@@ -206,7 +206,7 @@
           <a:p>
             <a:fld id="{E6375376-077A-8F42-9E71-155E70FB596E}" type="datetimeFigureOut">
               <a:rPr lang="en-US" smtClean="0"/>
-              <a:t>4/3/25</a:t>
+              <a:t>12/16/25</a:t>
             </a:fld>
             <a:endParaRPr lang="en-US"/>
           </a:p>
@@ -507,7 +507,6 @@
           <a:lstStyle/>
           <a:p>
             <a:r>
-              <a:rPr/>
               <a:t>
 Powerpoint file location: /Users/mbbowes/Documents/GitHub/grattantheme/tests/testthat/temp_rich_fullslide.pptx</a:t>
             </a:r>
@@ -1204,7 +1203,7 @@
           <a:p>
             <a:fld id="{184C34C6-D93D-964F-98F1-8B05274CB5BF}" type="datetimeFigureOut">
               <a:rPr lang="en-US" smtClean="0"/>
-              <a:t>4/3/25</a:t>
+              <a:t>12/16/25</a:t>
             </a:fld>
             <a:endParaRPr lang="en-US"/>
           </a:p>
@@ -1425,7 +1424,7 @@
           <a:p>
             <a:fld id="{184C34C6-D93D-964F-98F1-8B05274CB5BF}" type="datetimeFigureOut">
               <a:rPr lang="en-US" smtClean="0"/>
-              <a:t>4/3/25</a:t>
+              <a:t>12/16/25</a:t>
             </a:fld>
             <a:endParaRPr lang="en-US" dirty="0"/>
           </a:p>
@@ -1749,7 +1748,7 @@
           <a:p>
             <a:fld id="{184C34C6-D93D-964F-98F1-8B05274CB5BF}" type="datetimeFigureOut">
               <a:rPr lang="en-US" smtClean="0"/>
-              <a:t>4/3/25</a:t>
+              <a:t>12/16/25</a:t>
             </a:fld>
             <a:endParaRPr lang="en-US" dirty="0"/>
           </a:p>
@@ -2266,7 +2265,7 @@
           <a:p>
             <a:fld id="{184C34C6-D93D-964F-98F1-8B05274CB5BF}" type="datetimeFigureOut">
               <a:rPr lang="en-US" smtClean="0"/>
-              <a:t>4/3/25</a:t>
+              <a:t>12/16/25</a:t>
             </a:fld>
             <a:endParaRPr lang="en-US" dirty="0"/>
           </a:p>
@@ -2925,7 +2924,7 @@
           <a:p>
             <a:fld id="{184C34C6-D93D-964F-98F1-8B05274CB5BF}" type="datetimeFigureOut">
               <a:rPr lang="en-AU" noProof="0" smtClean="0"/>
-              <a:t>3/4/2025</a:t>
+              <a:t>16/12/2025</a:t>
             </a:fld>
             <a:endParaRPr lang="en-AU" noProof="0"/>
           </a:p>
@@ -3358,7 +3357,7 @@
       </p:grpSpPr>
       <p:pic>
         <p:nvPicPr>
-          <p:cNvPr id="2" name="Content Placeholder 3" descr=""/>
+          <p:cNvPr id="2" name="Content Placeholder 3"/>
           <p:cNvPicPr>
             <a:picLocks noGrp="1"/>
           </p:cNvPicPr>
@@ -3403,7 +3402,7 @@
           <a:lstStyle/>
           <a:p>
             <a:r>
-              <a:rPr/>
+              <a:rPr dirty="0"/>
               <a:t>My title</a:t>
             </a:r>
           </a:p>
@@ -3421,8 +3420,8 @@
         </p:nvSpPr>
         <p:spPr>
           <a:xfrm>
-            <a:off x="371475" y="6239781"/>
-            <a:ext cx="10662320" cy="455613"/>
+            <a:off x="371475" y="6092825"/>
+            <a:ext cx="10662320" cy="765175"/>
           </a:xfrm>
         </p:spPr>
         <p:txBody>
@@ -3430,7 +3429,6 @@
           <a:lstStyle/>
           <a:p>
             <a:r>
-              <a:rPr/>
               <a:t>Notes: notes. 
 Source: source</a:t>
             </a:r>

--- a/tests/testthat/temp_rich_fullslide.pptx
+++ b/tests/testthat/temp_rich_fullslide.pptx
@@ -5,10 +5,10 @@
     <p:sldMasterId id="2147483831" r:id="rId1"/>
   </p:sldMasterIdLst>
   <p:notesMasterIdLst>
-    <p:notesMasterId r:id="rId3"/>
+    <p:notesMasterId r:id="rId2"/>
   </p:notesMasterIdLst>
   <p:sldIdLst>
-    <p:sldId id="256" r:id="rId2"/>
+    <p:sldId id="256" r:id="rId8"/>
   </p:sldIdLst>
   <p:sldSz cx="12192000" cy="6858000"/>
   <p:notesSz cx="6858000" cy="9144000"/>
@@ -206,7 +206,7 @@
           <a:p>
             <a:fld id="{E6375376-077A-8F42-9E71-155E70FB596E}" type="datetimeFigureOut">
               <a:rPr lang="en-US" smtClean="0"/>
-              <a:t>12/16/25</a:t>
+              <a:t>4/3/25</a:t>
             </a:fld>
             <a:endParaRPr lang="en-US"/>
           </a:p>
@@ -507,6 +507,7 @@
           <a:lstStyle/>
           <a:p>
             <a:r>
+              <a:rPr/>
               <a:t>
 Powerpoint file location: /Users/mbbowes/Documents/GitHub/grattantheme/tests/testthat/temp_rich_fullslide.pptx</a:t>
             </a:r>
@@ -1203,7 +1204,7 @@
           <a:p>
             <a:fld id="{184C34C6-D93D-964F-98F1-8B05274CB5BF}" type="datetimeFigureOut">
               <a:rPr lang="en-US" smtClean="0"/>
-              <a:t>12/16/25</a:t>
+              <a:t>4/3/25</a:t>
             </a:fld>
             <a:endParaRPr lang="en-US"/>
           </a:p>
@@ -1424,7 +1425,7 @@
           <a:p>
             <a:fld id="{184C34C6-D93D-964F-98F1-8B05274CB5BF}" type="datetimeFigureOut">
               <a:rPr lang="en-US" smtClean="0"/>
-              <a:t>12/16/25</a:t>
+              <a:t>4/3/25</a:t>
             </a:fld>
             <a:endParaRPr lang="en-US" dirty="0"/>
           </a:p>
@@ -1748,7 +1749,7 @@
           <a:p>
             <a:fld id="{184C34C6-D93D-964F-98F1-8B05274CB5BF}" type="datetimeFigureOut">
               <a:rPr lang="en-US" smtClean="0"/>
-              <a:t>12/16/25</a:t>
+              <a:t>4/3/25</a:t>
             </a:fld>
             <a:endParaRPr lang="en-US" dirty="0"/>
           </a:p>
@@ -2265,7 +2266,7 @@
           <a:p>
             <a:fld id="{184C34C6-D93D-964F-98F1-8B05274CB5BF}" type="datetimeFigureOut">
               <a:rPr lang="en-US" smtClean="0"/>
-              <a:t>12/16/25</a:t>
+              <a:t>4/3/25</a:t>
             </a:fld>
             <a:endParaRPr lang="en-US" dirty="0"/>
           </a:p>
@@ -2924,7 +2925,7 @@
           <a:p>
             <a:fld id="{184C34C6-D93D-964F-98F1-8B05274CB5BF}" type="datetimeFigureOut">
               <a:rPr lang="en-AU" noProof="0" smtClean="0"/>
-              <a:t>16/12/2025</a:t>
+              <a:t>3/4/2025</a:t>
             </a:fld>
             <a:endParaRPr lang="en-AU" noProof="0"/>
           </a:p>
@@ -3357,7 +3358,7 @@
       </p:grpSpPr>
       <p:pic>
         <p:nvPicPr>
-          <p:cNvPr id="2" name="Content Placeholder 3"/>
+          <p:cNvPr id="2" name="Content Placeholder 3" descr=""/>
           <p:cNvPicPr>
             <a:picLocks noGrp="1"/>
           </p:cNvPicPr>
@@ -3402,7 +3403,7 @@
           <a:lstStyle/>
           <a:p>
             <a:r>
-              <a:rPr dirty="0"/>
+              <a:rPr/>
               <a:t>My title</a:t>
             </a:r>
           </a:p>
@@ -3420,8 +3421,8 @@
         </p:nvSpPr>
         <p:spPr>
           <a:xfrm>
-            <a:off x="371475" y="6092825"/>
-            <a:ext cx="10662320" cy="765175"/>
+            <a:off x="371475" y="6239781"/>
+            <a:ext cx="10662320" cy="455613"/>
           </a:xfrm>
         </p:spPr>
         <p:txBody>
@@ -3429,6 +3430,7 @@
           <a:lstStyle/>
           <a:p>
             <a:r>
+              <a:rPr/>
               <a:t>Notes: notes. 
 Source: source</a:t>
             </a:r>

--- a/tests/testthat/temp_rich_fullslide.pptx
+++ b/tests/testthat/temp_rich_fullslide.pptx
@@ -3431,7 +3431,7 @@
           <a:p>
             <a:r>
               <a:rPr/>
-              <a:t>Notes: notes. 
+              <a:t>Notes: notes.
 Source: source</a:t>
             </a:r>
           </a:p>
